--- a/reports/BRANCH_MATARAM_PERFORMANCE_SUMMARY_20260831_INARA.pptx
+++ b/reports/BRANCH_MATARAM_PERFORMANCE_SUMMARY_20260831_INARA.pptx
@@ -12493,7 +12493,7 @@
                 </a:solidFill>
                 <a:latin typeface="Arial"/>
               </a:rPr>
-              <a:t>173</a:t>
+              <a:t>184</a:t>
             </a:r>
           </a:p>
         </p:txBody>
@@ -12524,11 +12524,11 @@
             <a:r>
               <a:rPr sz="1200" b="1" i="0">
                 <a:solidFill>
-                  <a:srgbClr val="D73527"/>
+                  <a:srgbClr val="687386"/>
                 </a:solidFill>
                 <a:latin typeface="Arial"/>
               </a:rPr>
-              <a:t>-2,8%</a:t>
+              <a:t>N/A</a:t>
             </a:r>
           </a:p>
         </p:txBody>
@@ -12563,7 +12563,7 @@
                 </a:solidFill>
                 <a:latin typeface="Arial"/>
               </a:rPr>
-              <a:t>MTD-1: 178   Δ -5</a:t>
+              <a:t>MTD-1: 0   Δ 184</a:t>
             </a:r>
           </a:p>
         </p:txBody>
@@ -12680,7 +12680,7 @@
                 </a:solidFill>
                 <a:latin typeface="Arial"/>
               </a:rPr>
-              <a:t>5.450</a:t>
+              <a:t>5.810</a:t>
             </a:r>
           </a:p>
         </p:txBody>
@@ -12711,11 +12711,11 @@
             <a:r>
               <a:rPr sz="1200" b="1" i="0">
                 <a:solidFill>
-                  <a:srgbClr val="137D3F"/>
+                  <a:srgbClr val="687386"/>
                 </a:solidFill>
                 <a:latin typeface="Arial"/>
               </a:rPr>
-              <a:t>+24,2%</a:t>
+              <a:t>N/A</a:t>
             </a:r>
           </a:p>
         </p:txBody>
@@ -12750,7 +12750,7 @@
                 </a:solidFill>
                 <a:latin typeface="Arial"/>
               </a:rPr>
-              <a:t>MTD-1: 4.387   Δ 1.063</a:t>
+              <a:t>MTD-1: 0   Δ 5.810</a:t>
             </a:r>
           </a:p>
         </p:txBody>
@@ -13886,7 +13886,7 @@
                           </a:solidFill>
                           <a:latin typeface="Arial"/>
                         </a:rPr>
-                        <a:t>93</a:t>
+                        <a:t>0</a:t>
                       </a:r>
                     </a:p>
                   </a:txBody>
@@ -13933,7 +13933,7 @@
                           </a:solidFill>
                           <a:latin typeface="Arial"/>
                         </a:rPr>
-                        <a:t>90</a:t>
+                        <a:t>97</a:t>
                       </a:r>
                     </a:p>
                   </a:txBody>
@@ -13976,17 +13976,17 @@
                       <a:r>
                         <a:rPr sz="1050" b="0">
                           <a:solidFill>
-                            <a:srgbClr val="D73527"/>
-                          </a:solidFill>
-                          <a:latin typeface="Arial"/>
-                        </a:rPr>
-                        <a:t>-3,2%</a:t>
-                      </a:r>
-                    </a:p>
-                  </a:txBody>
-                  <a:tcPr marL="27432" marR="27432" marT="0" marB="0">
-                    <a:solidFill>
-                      <a:srgbClr val="FBE9E7"/>
+                            <a:srgbClr val="687386"/>
+                          </a:solidFill>
+                          <a:latin typeface="Arial"/>
+                        </a:rPr>
+                        <a:t>N/A</a:t>
+                      </a:r>
+                    </a:p>
+                  </a:txBody>
+                  <a:tcPr marL="27432" marR="27432" marT="0" marB="0">
+                    <a:solidFill>
+                      <a:srgbClr val="E9EDF2"/>
                     </a:solidFill>
                     <a:lnL w="9000" cap="flat" cmpd="sng" algn="ctr">
                       <a:solidFill>
@@ -14027,7 +14027,7 @@
                           </a:solidFill>
                           <a:latin typeface="Arial"/>
                         </a:rPr>
-                        <a:t>2.253</a:t>
+                        <a:t>0</a:t>
                       </a:r>
                     </a:p>
                   </a:txBody>
@@ -14074,7 +14074,7 @@
                           </a:solidFill>
                           <a:latin typeface="Arial"/>
                         </a:rPr>
-                        <a:t>2.232</a:t>
+                        <a:t>2.410</a:t>
                       </a:r>
                     </a:p>
                   </a:txBody>
@@ -14117,17 +14117,17 @@
                       <a:r>
                         <a:rPr sz="1050" b="0">
                           <a:solidFill>
-                            <a:srgbClr val="D73527"/>
-                          </a:solidFill>
-                          <a:latin typeface="Arial"/>
-                        </a:rPr>
-                        <a:t>-0,9%</a:t>
-                      </a:r>
-                    </a:p>
-                  </a:txBody>
-                  <a:tcPr marL="27432" marR="27432" marT="0" marB="0">
-                    <a:solidFill>
-                      <a:srgbClr val="FBE9E7"/>
+                            <a:srgbClr val="687386"/>
+                          </a:solidFill>
+                          <a:latin typeface="Arial"/>
+                        </a:rPr>
+                        <a:t>N/A</a:t>
+                      </a:r>
+                    </a:p>
+                  </a:txBody>
+                  <a:tcPr marL="27432" marR="27432" marT="0" marB="0">
+                    <a:solidFill>
+                      <a:srgbClr val="E9EDF2"/>
                     </a:solidFill>
                     <a:lnL w="9000" cap="flat" cmpd="sng" algn="ctr">
                       <a:solidFill>
@@ -14546,7 +14546,7 @@
                           </a:solidFill>
                           <a:latin typeface="Arial"/>
                         </a:rPr>
-                        <a:t>85</a:t>
+                        <a:t>0</a:t>
                       </a:r>
                     </a:p>
                   </a:txBody>
@@ -14593,7 +14593,7 @@
                           </a:solidFill>
                           <a:latin typeface="Arial"/>
                         </a:rPr>
-                        <a:t>83</a:t>
+                        <a:t>87</a:t>
                       </a:r>
                     </a:p>
                   </a:txBody>
@@ -14636,17 +14636,17 @@
                       <a:r>
                         <a:rPr sz="1050" b="0">
                           <a:solidFill>
-                            <a:srgbClr val="D73527"/>
-                          </a:solidFill>
-                          <a:latin typeface="Arial"/>
-                        </a:rPr>
-                        <a:t>-2,4%</a:t>
-                      </a:r>
-                    </a:p>
-                  </a:txBody>
-                  <a:tcPr marL="27432" marR="27432" marT="0" marB="0">
-                    <a:solidFill>
-                      <a:srgbClr val="FBE9E7"/>
+                            <a:srgbClr val="687386"/>
+                          </a:solidFill>
+                          <a:latin typeface="Arial"/>
+                        </a:rPr>
+                        <a:t>N/A</a:t>
+                      </a:r>
+                    </a:p>
+                  </a:txBody>
+                  <a:tcPr marL="27432" marR="27432" marT="0" marB="0">
+                    <a:solidFill>
+                      <a:srgbClr val="E9EDF2"/>
                     </a:solidFill>
                     <a:lnL w="9000" cap="flat" cmpd="sng" algn="ctr">
                       <a:solidFill>
@@ -14687,7 +14687,7 @@
                           </a:solidFill>
                           <a:latin typeface="Arial"/>
                         </a:rPr>
-                        <a:t>2.134</a:t>
+                        <a:t>0</a:t>
                       </a:r>
                     </a:p>
                   </a:txBody>
@@ -14734,7 +14734,7 @@
                           </a:solidFill>
                           <a:latin typeface="Arial"/>
                         </a:rPr>
-                        <a:t>3.218</a:t>
+                        <a:t>3.400</a:t>
                       </a:r>
                     </a:p>
                   </a:txBody>
@@ -14777,17 +14777,17 @@
                       <a:r>
                         <a:rPr sz="1050" b="0">
                           <a:solidFill>
-                            <a:srgbClr val="137D3F"/>
-                          </a:solidFill>
-                          <a:latin typeface="Arial"/>
-                        </a:rPr>
-                        <a:t>+50,8%</a:t>
-                      </a:r>
-                    </a:p>
-                  </a:txBody>
-                  <a:tcPr marL="27432" marR="27432" marT="0" marB="0">
-                    <a:solidFill>
-                      <a:srgbClr val="E5F4EA"/>
+                            <a:srgbClr val="687386"/>
+                          </a:solidFill>
+                          <a:latin typeface="Arial"/>
+                        </a:rPr>
+                        <a:t>N/A</a:t>
+                      </a:r>
+                    </a:p>
+                  </a:txBody>
+                  <a:tcPr marL="27432" marR="27432" marT="0" marB="0">
+                    <a:solidFill>
+                      <a:srgbClr val="E9EDF2"/>
                     </a:solidFill>
                     <a:lnL w="9000" cap="flat" cmpd="sng" algn="ctr">
                       <a:solidFill>
@@ -22131,7 +22131,7 @@
                           </a:solidFill>
                           <a:latin typeface="Arial"/>
                         </a:rPr>
-                        <a:t>885</a:t>
+                        <a:t>931</a:t>
                       </a:r>
                     </a:p>
                   </a:txBody>
@@ -22178,7 +22178,7 @@
                           </a:solidFill>
                           <a:latin typeface="Arial"/>
                         </a:rPr>
-                        <a:t>1.863</a:t>
+                        <a:t>1.892</a:t>
                       </a:r>
                     </a:p>
                   </a:txBody>
@@ -22225,7 +22225,7 @@
                           </a:solidFill>
                           <a:latin typeface="Arial"/>
                         </a:rPr>
-                        <a:t>13.734</a:t>
+                        <a:t>13.689</a:t>
                       </a:r>
                     </a:p>
                   </a:txBody>
@@ -22272,7 +22272,7 @@
                           </a:solidFill>
                           <a:latin typeface="Arial"/>
                         </a:rPr>
-                        <a:t>1.820</a:t>
+                        <a:t>1.813</a:t>
                       </a:r>
                     </a:p>
                   </a:txBody>
@@ -22319,7 +22319,7 @@
                           </a:solidFill>
                           <a:latin typeface="Arial"/>
                         </a:rPr>
-                        <a:t>1.477</a:t>
+                        <a:t>1.458</a:t>
                       </a:r>
                     </a:p>
                   </a:txBody>
@@ -22366,7 +22366,7 @@
                           </a:solidFill>
                           <a:latin typeface="Arial"/>
                         </a:rPr>
-                        <a:t>19.779</a:t>
+                        <a:t>19.783</a:t>
                       </a:r>
                     </a:p>
                   </a:txBody>
@@ -22415,7 +22415,7 @@
                           </a:solidFill>
                           <a:latin typeface="Arial"/>
                         </a:rPr>
-                        <a:t>4,5%</a:t>
+                        <a:t>4,7%</a:t>
                       </a:r>
                     </a:p>
                   </a:txBody>
@@ -22462,7 +22462,7 @@
                           </a:solidFill>
                           <a:latin typeface="Arial"/>
                         </a:rPr>
-                        <a:t>9,4%</a:t>
+                        <a:t>9,6%</a:t>
                       </a:r>
                     </a:p>
                   </a:txBody>
@@ -22509,7 +22509,7 @@
                           </a:solidFill>
                           <a:latin typeface="Arial"/>
                         </a:rPr>
-                        <a:t>69,4%</a:t>
+                        <a:t>69,2%</a:t>
                       </a:r>
                     </a:p>
                   </a:txBody>
@@ -22603,7 +22603,7 @@
                           </a:solidFill>
                           <a:latin typeface="Arial"/>
                         </a:rPr>
-                        <a:t>7,5%</a:t>
+                        <a:t>7,4%</a:t>
                       </a:r>
                     </a:p>
                   </a:txBody>
@@ -22836,7 +22836,7 @@
                 </a:solidFill>
                 <a:latin typeface="Arial"/>
               </a:rPr>
-              <a:t>Jumlah ODP  1.477</a:t>
+              <a:t>Jumlah ODP  1.458</a:t>
             </a:r>
           </a:p>
         </p:txBody>
@@ -22871,7 +22871,7 @@
                 </a:solidFill>
                 <a:latin typeface="Arial"/>
               </a:rPr>
-              <a:t>ODP dikunjungi  495 (33,5%)</a:t>
+              <a:t>ODP dikunjungi  491 (33,7%)</a:t>
             </a:r>
           </a:p>
         </p:txBody>
@@ -22941,7 +22941,7 @@
                 </a:solidFill>
                 <a:latin typeface="Arial"/>
               </a:rPr>
-              <a:t>1.045</a:t>
+              <a:t>1.128</a:t>
             </a:r>
           </a:p>
         </p:txBody>
@@ -23093,7 +23093,7 @@
                 </a:solidFill>
                 <a:latin typeface="Arial"/>
               </a:rPr>
-              <a:t>ODP dikunjungi  441 (91,7%)</a:t>
+              <a:t>ODP dikunjungi  444 (92,3%)</a:t>
             </a:r>
           </a:p>
         </p:txBody>
@@ -23163,7 +23163,7 @@
                 </a:solidFill>
                 <a:latin typeface="Arial"/>
               </a:rPr>
-              <a:t>1.162</a:t>
+              <a:t>1.322</a:t>
             </a:r>
           </a:p>
         </p:txBody>

--- a/reports/BRANCH_MATARAM_PERFORMANCE_SUMMARY_20260831_INARA.pptx
+++ b/reports/BRANCH_MATARAM_PERFORMANCE_SUMMARY_20260831_INARA.pptx
@@ -12524,11 +12524,11 @@
             <a:r>
               <a:rPr sz="1200" b="1" i="0">
                 <a:solidFill>
-                  <a:srgbClr val="687386"/>
+                  <a:srgbClr val="137D3F"/>
                 </a:solidFill>
                 <a:latin typeface="Arial"/>
               </a:rPr>
-              <a:t>N/A</a:t>
+              <a:t>+2,2%</a:t>
             </a:r>
           </a:p>
         </p:txBody>
@@ -12563,7 +12563,7 @@
                 </a:solidFill>
                 <a:latin typeface="Arial"/>
               </a:rPr>
-              <a:t>MTD-1: 0   Δ 184</a:t>
+              <a:t>MTD-1: 180   Δ 4</a:t>
             </a:r>
           </a:p>
         </p:txBody>
@@ -12711,11 +12711,11 @@
             <a:r>
               <a:rPr sz="1200" b="1" i="0">
                 <a:solidFill>
-                  <a:srgbClr val="687386"/>
+                  <a:srgbClr val="137D3F"/>
                 </a:solidFill>
                 <a:latin typeface="Arial"/>
               </a:rPr>
-              <a:t>N/A</a:t>
+              <a:t>+22,8%</a:t>
             </a:r>
           </a:p>
         </p:txBody>
@@ -12750,7 +12750,7 @@
                 </a:solidFill>
                 <a:latin typeface="Arial"/>
               </a:rPr>
-              <a:t>MTD-1: 0   Δ 5.810</a:t>
+              <a:t>MTD-1: 4.733   Δ 1.077</a:t>
             </a:r>
           </a:p>
         </p:txBody>
@@ -13886,7 +13886,7 @@
                           </a:solidFill>
                           <a:latin typeface="Arial"/>
                         </a:rPr>
-                        <a:t>0</a:t>
+                        <a:t>95</a:t>
                       </a:r>
                     </a:p>
                   </a:txBody>
@@ -13976,152 +13976,152 @@
                       <a:r>
                         <a:rPr sz="1050" b="0">
                           <a:solidFill>
+                            <a:srgbClr val="137D3F"/>
+                          </a:solidFill>
+                          <a:latin typeface="Arial"/>
+                        </a:rPr>
+                        <a:t>+2,1%</a:t>
+                      </a:r>
+                    </a:p>
+                  </a:txBody>
+                  <a:tcPr marL="27432" marR="27432" marT="0" marB="0">
+                    <a:solidFill>
+                      <a:srgbClr val="E5F4EA"/>
+                    </a:solidFill>
+                    <a:lnL w="9000" cap="flat" cmpd="sng" algn="ctr">
+                      <a:solidFill>
+                        <a:srgbClr val="D8DEE7"/>
+                      </a:solidFill>
+                      <a:prstDash val="solid"/>
+                    </a:lnL>
+                    <a:lnR w="9000" cap="flat" cmpd="sng" algn="ctr">
+                      <a:solidFill>
+                        <a:srgbClr val="D8DEE7"/>
+                      </a:solidFill>
+                      <a:prstDash val="solid"/>
+                    </a:lnR>
+                    <a:lnT w="9000" cap="flat" cmpd="sng" algn="ctr">
+                      <a:solidFill>
+                        <a:srgbClr val="D8DEE7"/>
+                      </a:solidFill>
+                      <a:prstDash val="solid"/>
+                    </a:lnT>
+                    <a:lnB w="9000" cap="flat" cmpd="sng" algn="ctr">
+                      <a:solidFill>
+                        <a:srgbClr val="D8DEE7"/>
+                      </a:solidFill>
+                      <a:prstDash val="solid"/>
+                    </a:lnB>
+                  </a:tcPr>
+                </a:tc>
+                <a:tc>
+                  <a:txBody>
+                    <a:bodyPr lIns="27432" rIns="27432" tIns="0" bIns="0" anchor="ctr"/>
+                    <a:lstStyle/>
+                    <a:p>
+                      <a:pPr algn="ctr"/>
+                      <a:r>
+                        <a:rPr sz="1050" b="0">
+                          <a:solidFill>
+                            <a:srgbClr val="20252B"/>
+                          </a:solidFill>
+                          <a:latin typeface="Arial"/>
+                        </a:rPr>
+                        <a:t>2.411</a:t>
+                      </a:r>
+                    </a:p>
+                  </a:txBody>
+                  <a:tcPr marL="27432" marR="27432" marT="0" marB="0">
+                    <a:solidFill>
+                      <a:srgbClr val="FFFFFF"/>
+                    </a:solidFill>
+                    <a:lnL w="9000" cap="flat" cmpd="sng" algn="ctr">
+                      <a:solidFill>
+                        <a:srgbClr val="D8DEE7"/>
+                      </a:solidFill>
+                      <a:prstDash val="solid"/>
+                    </a:lnL>
+                    <a:lnR w="9000" cap="flat" cmpd="sng" algn="ctr">
+                      <a:solidFill>
+                        <a:srgbClr val="D8DEE7"/>
+                      </a:solidFill>
+                      <a:prstDash val="solid"/>
+                    </a:lnR>
+                    <a:lnT w="9000" cap="flat" cmpd="sng" algn="ctr">
+                      <a:solidFill>
+                        <a:srgbClr val="D8DEE7"/>
+                      </a:solidFill>
+                      <a:prstDash val="solid"/>
+                    </a:lnT>
+                    <a:lnB w="9000" cap="flat" cmpd="sng" algn="ctr">
+                      <a:solidFill>
+                        <a:srgbClr val="D8DEE7"/>
+                      </a:solidFill>
+                      <a:prstDash val="solid"/>
+                    </a:lnB>
+                  </a:tcPr>
+                </a:tc>
+                <a:tc>
+                  <a:txBody>
+                    <a:bodyPr lIns="27432" rIns="27432" tIns="0" bIns="0" anchor="ctr"/>
+                    <a:lstStyle/>
+                    <a:p>
+                      <a:pPr algn="ctr"/>
+                      <a:r>
+                        <a:rPr sz="1050" b="1">
+                          <a:solidFill>
+                            <a:srgbClr val="20252B"/>
+                          </a:solidFill>
+                          <a:latin typeface="Arial"/>
+                        </a:rPr>
+                        <a:t>2.410</a:t>
+                      </a:r>
+                    </a:p>
+                  </a:txBody>
+                  <a:tcPr marL="27432" marR="27432" marT="0" marB="0">
+                    <a:solidFill>
+                      <a:srgbClr val="FFFFFF"/>
+                    </a:solidFill>
+                    <a:lnL w="9000" cap="flat" cmpd="sng" algn="ctr">
+                      <a:solidFill>
+                        <a:srgbClr val="D8DEE7"/>
+                      </a:solidFill>
+                      <a:prstDash val="solid"/>
+                    </a:lnL>
+                    <a:lnR w="9000" cap="flat" cmpd="sng" algn="ctr">
+                      <a:solidFill>
+                        <a:srgbClr val="D8DEE7"/>
+                      </a:solidFill>
+                      <a:prstDash val="solid"/>
+                    </a:lnR>
+                    <a:lnT w="9000" cap="flat" cmpd="sng" algn="ctr">
+                      <a:solidFill>
+                        <a:srgbClr val="D8DEE7"/>
+                      </a:solidFill>
+                      <a:prstDash val="solid"/>
+                    </a:lnT>
+                    <a:lnB w="9000" cap="flat" cmpd="sng" algn="ctr">
+                      <a:solidFill>
+                        <a:srgbClr val="D8DEE7"/>
+                      </a:solidFill>
+                      <a:prstDash val="solid"/>
+                    </a:lnB>
+                  </a:tcPr>
+                </a:tc>
+                <a:tc>
+                  <a:txBody>
+                    <a:bodyPr lIns="27432" rIns="27432" tIns="0" bIns="0" anchor="ctr"/>
+                    <a:lstStyle/>
+                    <a:p>
+                      <a:pPr algn="ctr"/>
+                      <a:r>
+                        <a:rPr sz="1050" b="0">
+                          <a:solidFill>
                             <a:srgbClr val="687386"/>
                           </a:solidFill>
                           <a:latin typeface="Arial"/>
                         </a:rPr>
-                        <a:t>N/A</a:t>
-                      </a:r>
-                    </a:p>
-                  </a:txBody>
-                  <a:tcPr marL="27432" marR="27432" marT="0" marB="0">
-                    <a:solidFill>
-                      <a:srgbClr val="E9EDF2"/>
-                    </a:solidFill>
-                    <a:lnL w="9000" cap="flat" cmpd="sng" algn="ctr">
-                      <a:solidFill>
-                        <a:srgbClr val="D8DEE7"/>
-                      </a:solidFill>
-                      <a:prstDash val="solid"/>
-                    </a:lnL>
-                    <a:lnR w="9000" cap="flat" cmpd="sng" algn="ctr">
-                      <a:solidFill>
-                        <a:srgbClr val="D8DEE7"/>
-                      </a:solidFill>
-                      <a:prstDash val="solid"/>
-                    </a:lnR>
-                    <a:lnT w="9000" cap="flat" cmpd="sng" algn="ctr">
-                      <a:solidFill>
-                        <a:srgbClr val="D8DEE7"/>
-                      </a:solidFill>
-                      <a:prstDash val="solid"/>
-                    </a:lnT>
-                    <a:lnB w="9000" cap="flat" cmpd="sng" algn="ctr">
-                      <a:solidFill>
-                        <a:srgbClr val="D8DEE7"/>
-                      </a:solidFill>
-                      <a:prstDash val="solid"/>
-                    </a:lnB>
-                  </a:tcPr>
-                </a:tc>
-                <a:tc>
-                  <a:txBody>
-                    <a:bodyPr lIns="27432" rIns="27432" tIns="0" bIns="0" anchor="ctr"/>
-                    <a:lstStyle/>
-                    <a:p>
-                      <a:pPr algn="ctr"/>
-                      <a:r>
-                        <a:rPr sz="1050" b="0">
-                          <a:solidFill>
-                            <a:srgbClr val="20252B"/>
-                          </a:solidFill>
-                          <a:latin typeface="Arial"/>
-                        </a:rPr>
-                        <a:t>0</a:t>
-                      </a:r>
-                    </a:p>
-                  </a:txBody>
-                  <a:tcPr marL="27432" marR="27432" marT="0" marB="0">
-                    <a:solidFill>
-                      <a:srgbClr val="FFFFFF"/>
-                    </a:solidFill>
-                    <a:lnL w="9000" cap="flat" cmpd="sng" algn="ctr">
-                      <a:solidFill>
-                        <a:srgbClr val="D8DEE7"/>
-                      </a:solidFill>
-                      <a:prstDash val="solid"/>
-                    </a:lnL>
-                    <a:lnR w="9000" cap="flat" cmpd="sng" algn="ctr">
-                      <a:solidFill>
-                        <a:srgbClr val="D8DEE7"/>
-                      </a:solidFill>
-                      <a:prstDash val="solid"/>
-                    </a:lnR>
-                    <a:lnT w="9000" cap="flat" cmpd="sng" algn="ctr">
-                      <a:solidFill>
-                        <a:srgbClr val="D8DEE7"/>
-                      </a:solidFill>
-                      <a:prstDash val="solid"/>
-                    </a:lnT>
-                    <a:lnB w="9000" cap="flat" cmpd="sng" algn="ctr">
-                      <a:solidFill>
-                        <a:srgbClr val="D8DEE7"/>
-                      </a:solidFill>
-                      <a:prstDash val="solid"/>
-                    </a:lnB>
-                  </a:tcPr>
-                </a:tc>
-                <a:tc>
-                  <a:txBody>
-                    <a:bodyPr lIns="27432" rIns="27432" tIns="0" bIns="0" anchor="ctr"/>
-                    <a:lstStyle/>
-                    <a:p>
-                      <a:pPr algn="ctr"/>
-                      <a:r>
-                        <a:rPr sz="1050" b="1">
-                          <a:solidFill>
-                            <a:srgbClr val="20252B"/>
-                          </a:solidFill>
-                          <a:latin typeface="Arial"/>
-                        </a:rPr>
-                        <a:t>2.410</a:t>
-                      </a:r>
-                    </a:p>
-                  </a:txBody>
-                  <a:tcPr marL="27432" marR="27432" marT="0" marB="0">
-                    <a:solidFill>
-                      <a:srgbClr val="FFFFFF"/>
-                    </a:solidFill>
-                    <a:lnL w="9000" cap="flat" cmpd="sng" algn="ctr">
-                      <a:solidFill>
-                        <a:srgbClr val="D8DEE7"/>
-                      </a:solidFill>
-                      <a:prstDash val="solid"/>
-                    </a:lnL>
-                    <a:lnR w="9000" cap="flat" cmpd="sng" algn="ctr">
-                      <a:solidFill>
-                        <a:srgbClr val="D8DEE7"/>
-                      </a:solidFill>
-                      <a:prstDash val="solid"/>
-                    </a:lnR>
-                    <a:lnT w="9000" cap="flat" cmpd="sng" algn="ctr">
-                      <a:solidFill>
-                        <a:srgbClr val="D8DEE7"/>
-                      </a:solidFill>
-                      <a:prstDash val="solid"/>
-                    </a:lnT>
-                    <a:lnB w="9000" cap="flat" cmpd="sng" algn="ctr">
-                      <a:solidFill>
-                        <a:srgbClr val="D8DEE7"/>
-                      </a:solidFill>
-                      <a:prstDash val="solid"/>
-                    </a:lnB>
-                  </a:tcPr>
-                </a:tc>
-                <a:tc>
-                  <a:txBody>
-                    <a:bodyPr lIns="27432" rIns="27432" tIns="0" bIns="0" anchor="ctr"/>
-                    <a:lstStyle/>
-                    <a:p>
-                      <a:pPr algn="ctr"/>
-                      <a:r>
-                        <a:rPr sz="1050" b="0">
-                          <a:solidFill>
-                            <a:srgbClr val="687386"/>
-                          </a:solidFill>
-                          <a:latin typeface="Arial"/>
-                        </a:rPr>
-                        <a:t>N/A</a:t>
+                        <a:t>0,0%</a:t>
                       </a:r>
                     </a:p>
                   </a:txBody>
@@ -14546,7 +14546,7 @@
                           </a:solidFill>
                           <a:latin typeface="Arial"/>
                         </a:rPr>
-                        <a:t>0</a:t>
+                        <a:t>85</a:t>
                       </a:r>
                     </a:p>
                   </a:txBody>
@@ -14636,17 +14636,17 @@
                       <a:r>
                         <a:rPr sz="1050" b="0">
                           <a:solidFill>
-                            <a:srgbClr val="687386"/>
-                          </a:solidFill>
-                          <a:latin typeface="Arial"/>
-                        </a:rPr>
-                        <a:t>N/A</a:t>
-                      </a:r>
-                    </a:p>
-                  </a:txBody>
-                  <a:tcPr marL="27432" marR="27432" marT="0" marB="0">
-                    <a:solidFill>
-                      <a:srgbClr val="E9EDF2"/>
+                            <a:srgbClr val="137D3F"/>
+                          </a:solidFill>
+                          <a:latin typeface="Arial"/>
+                        </a:rPr>
+                        <a:t>+2,4%</a:t>
+                      </a:r>
+                    </a:p>
+                  </a:txBody>
+                  <a:tcPr marL="27432" marR="27432" marT="0" marB="0">
+                    <a:solidFill>
+                      <a:srgbClr val="E5F4EA"/>
                     </a:solidFill>
                     <a:lnL w="9000" cap="flat" cmpd="sng" algn="ctr">
                       <a:solidFill>
@@ -14687,7 +14687,7 @@
                           </a:solidFill>
                           <a:latin typeface="Arial"/>
                         </a:rPr>
-                        <a:t>0</a:t>
+                        <a:t>2.322</a:t>
                       </a:r>
                     </a:p>
                   </a:txBody>
@@ -14777,17 +14777,17 @@
                       <a:r>
                         <a:rPr sz="1050" b="0">
                           <a:solidFill>
-                            <a:srgbClr val="687386"/>
-                          </a:solidFill>
-                          <a:latin typeface="Arial"/>
-                        </a:rPr>
-                        <a:t>N/A</a:t>
-                      </a:r>
-                    </a:p>
-                  </a:txBody>
-                  <a:tcPr marL="27432" marR="27432" marT="0" marB="0">
-                    <a:solidFill>
-                      <a:srgbClr val="E9EDF2"/>
+                            <a:srgbClr val="137D3F"/>
+                          </a:solidFill>
+                          <a:latin typeface="Arial"/>
+                        </a:rPr>
+                        <a:t>+46,4%</a:t>
+                      </a:r>
+                    </a:p>
+                  </a:txBody>
+                  <a:tcPr marL="27432" marR="27432" marT="0" marB="0">
+                    <a:solidFill>
+                      <a:srgbClr val="E5F4EA"/>
                     </a:solidFill>
                     <a:lnL w="9000" cap="flat" cmpd="sng" algn="ctr">
                       <a:solidFill>

--- a/reports/BRANCH_MATARAM_PERFORMANCE_SUMMARY_20260831_INARA.pptx
+++ b/reports/BRANCH_MATARAM_PERFORMANCE_SUMMARY_20260831_INARA.pptx
@@ -22873,7 +22873,7 @@
                 </a:solidFill>
                 <a:latin typeface="Arial"/>
               </a:rPr>
-              <a:t>ODP dikunjungi  491 (33,7%)</a:t>
+              <a:t>ODP dikunjungi  505 (34,6%)</a:t>
             </a:r>
           </a:p>
         </p:txBody>
@@ -22943,7 +22943,7 @@
                 </a:solidFill>
                 <a:latin typeface="Arial"/>
               </a:rPr>
-              <a:t>1.128</a:t>
+              <a:t>2.195</a:t>
             </a:r>
           </a:p>
         </p:txBody>
@@ -23095,7 +23095,7 @@
                 </a:solidFill>
                 <a:latin typeface="Arial"/>
               </a:rPr>
-              <a:t>ODP dikunjungi  444 (92,3%)</a:t>
+              <a:t>ODP dikunjungi  453 (94,2%)</a:t>
             </a:r>
           </a:p>
         </p:txBody>
@@ -23165,7 +23165,7 @@
                 </a:solidFill>
                 <a:latin typeface="Arial"/>
               </a:rPr>
-              <a:t>1.322</a:t>
+              <a:t>2.630</a:t>
             </a:r>
           </a:p>
         </p:txBody>
